--- a/PPTs/MAL17.pptx
+++ b/PPTs/MAL17.pptx
@@ -268,7 +268,7 @@
           <a:p>
             <a:fld id="{CCB236BB-53DE-4462-8C4F-7698E6995948}" type="datetimeFigureOut">
               <a:rPr lang="en-IN" smtClean="0"/>
-              <a:t>08-02-2026</a:t>
+              <a:t>22-02-2026</a:t>
             </a:fld>
             <a:endParaRPr lang="en-IN" dirty="0"/>
           </a:p>
@@ -468,7 +468,7 @@
           <a:p>
             <a:fld id="{CCB236BB-53DE-4462-8C4F-7698E6995948}" type="datetimeFigureOut">
               <a:rPr lang="en-IN" smtClean="0"/>
-              <a:t>08-02-2026</a:t>
+              <a:t>22-02-2026</a:t>
             </a:fld>
             <a:endParaRPr lang="en-IN" dirty="0"/>
           </a:p>
@@ -678,7 +678,7 @@
           <a:p>
             <a:fld id="{CCB236BB-53DE-4462-8C4F-7698E6995948}" type="datetimeFigureOut">
               <a:rPr lang="en-IN" smtClean="0"/>
-              <a:t>08-02-2026</a:t>
+              <a:t>22-02-2026</a:t>
             </a:fld>
             <a:endParaRPr lang="en-IN" dirty="0"/>
           </a:p>
@@ -878,7 +878,7 @@
           <a:p>
             <a:fld id="{CCB236BB-53DE-4462-8C4F-7698E6995948}" type="datetimeFigureOut">
               <a:rPr lang="en-IN" smtClean="0"/>
-              <a:t>08-02-2026</a:t>
+              <a:t>22-02-2026</a:t>
             </a:fld>
             <a:endParaRPr lang="en-IN" dirty="0"/>
           </a:p>
@@ -1154,7 +1154,7 @@
           <a:p>
             <a:fld id="{CCB236BB-53DE-4462-8C4F-7698E6995948}" type="datetimeFigureOut">
               <a:rPr lang="en-IN" smtClean="0"/>
-              <a:t>08-02-2026</a:t>
+              <a:t>22-02-2026</a:t>
             </a:fld>
             <a:endParaRPr lang="en-IN" dirty="0"/>
           </a:p>
@@ -1422,7 +1422,7 @@
           <a:p>
             <a:fld id="{CCB236BB-53DE-4462-8C4F-7698E6995948}" type="datetimeFigureOut">
               <a:rPr lang="en-IN" smtClean="0"/>
-              <a:t>08-02-2026</a:t>
+              <a:t>22-02-2026</a:t>
             </a:fld>
             <a:endParaRPr lang="en-IN" dirty="0"/>
           </a:p>
@@ -1837,7 +1837,7 @@
           <a:p>
             <a:fld id="{CCB236BB-53DE-4462-8C4F-7698E6995948}" type="datetimeFigureOut">
               <a:rPr lang="en-IN" smtClean="0"/>
-              <a:t>08-02-2026</a:t>
+              <a:t>22-02-2026</a:t>
             </a:fld>
             <a:endParaRPr lang="en-IN" dirty="0"/>
           </a:p>
@@ -1979,7 +1979,7 @@
           <a:p>
             <a:fld id="{CCB236BB-53DE-4462-8C4F-7698E6995948}" type="datetimeFigureOut">
               <a:rPr lang="en-IN" smtClean="0"/>
-              <a:t>08-02-2026</a:t>
+              <a:t>22-02-2026</a:t>
             </a:fld>
             <a:endParaRPr lang="en-IN" dirty="0"/>
           </a:p>
@@ -2092,7 +2092,7 @@
           <a:p>
             <a:fld id="{CCB236BB-53DE-4462-8C4F-7698E6995948}" type="datetimeFigureOut">
               <a:rPr lang="en-IN" smtClean="0"/>
-              <a:t>08-02-2026</a:t>
+              <a:t>22-02-2026</a:t>
             </a:fld>
             <a:endParaRPr lang="en-IN" dirty="0"/>
           </a:p>
@@ -2405,7 +2405,7 @@
           <a:p>
             <a:fld id="{CCB236BB-53DE-4462-8C4F-7698E6995948}" type="datetimeFigureOut">
               <a:rPr lang="en-IN" smtClean="0"/>
-              <a:t>08-02-2026</a:t>
+              <a:t>22-02-2026</a:t>
             </a:fld>
             <a:endParaRPr lang="en-IN" dirty="0"/>
           </a:p>
@@ -2694,7 +2694,7 @@
           <a:p>
             <a:fld id="{CCB236BB-53DE-4462-8C4F-7698E6995948}" type="datetimeFigureOut">
               <a:rPr lang="en-IN" smtClean="0"/>
-              <a:t>08-02-2026</a:t>
+              <a:t>22-02-2026</a:t>
             </a:fld>
             <a:endParaRPr lang="en-IN" dirty="0"/>
           </a:p>
@@ -2940,7 +2940,7 @@
           <a:p>
             <a:fld id="{CCB236BB-53DE-4462-8C4F-7698E6995948}" type="datetimeFigureOut">
               <a:rPr lang="en-IN" smtClean="0"/>
-              <a:t>08-02-2026</a:t>
+              <a:t>22-02-2026</a:t>
             </a:fld>
             <a:endParaRPr lang="en-IN" dirty="0"/>
           </a:p>
@@ -3415,7 +3415,7 @@
           <p:cNvPr id="3" name="TextBox 2">
             <a:extLst>
               <a:ext uri="{FF2B5EF4-FFF2-40B4-BE49-F238E27FC236}">
-                <a16:creationId xmlns:a16="http://schemas.microsoft.com/office/drawing/2014/main" id="{082A7210-45AF-E4E7-6CB2-AF7F05842BC0}"/>
+                <a16:creationId xmlns:a16="http://schemas.microsoft.com/office/drawing/2014/main" id="{6F1FE5E0-9822-2DF5-47DD-213C0DCBB649}"/>
               </a:ext>
             </a:extLst>
           </p:cNvPr>
@@ -3424,8 +3424,8 @@
         </p:nvSpPr>
         <p:spPr>
           <a:xfrm>
-            <a:off x="-1" y="5374693"/>
-            <a:ext cx="12191999" cy="1446550"/>
+            <a:off x="0" y="5374693"/>
+            <a:ext cx="12192000" cy="1446550"/>
           </a:xfrm>
           <a:prstGeom prst="rect">
             <a:avLst/>
@@ -3622,7 +3622,7 @@
           <p:cNvPr id="3" name="TextBox 2">
             <a:extLst>
               <a:ext uri="{FF2B5EF4-FFF2-40B4-BE49-F238E27FC236}">
-                <a16:creationId xmlns:a16="http://schemas.microsoft.com/office/drawing/2014/main" id="{7AF808D4-134F-2916-D9A9-D24F9843B41E}"/>
+                <a16:creationId xmlns:a16="http://schemas.microsoft.com/office/drawing/2014/main" id="{BB6E4D59-202A-5556-4376-DA8728CBCBC3}"/>
               </a:ext>
             </a:extLst>
           </p:cNvPr>
@@ -3631,7 +3631,7 @@
         </p:nvSpPr>
         <p:spPr>
           <a:xfrm>
-            <a:off x="0" y="5377729"/>
+            <a:off x="0" y="5377730"/>
             <a:ext cx="12192000" cy="1446550"/>
           </a:xfrm>
           <a:prstGeom prst="rect">
@@ -3844,7 +3844,7 @@
           <p:cNvPr id="3" name="TextBox 2">
             <a:extLst>
               <a:ext uri="{FF2B5EF4-FFF2-40B4-BE49-F238E27FC236}">
-                <a16:creationId xmlns:a16="http://schemas.microsoft.com/office/drawing/2014/main" id="{335F803A-53C0-43F8-DD57-FF9E426008FA}"/>
+                <a16:creationId xmlns:a16="http://schemas.microsoft.com/office/drawing/2014/main" id="{6A8E276C-5A20-6608-091D-58C26EA5EDB9}"/>
               </a:ext>
             </a:extLst>
           </p:cNvPr>
@@ -3853,8 +3853,8 @@
         </p:nvSpPr>
         <p:spPr>
           <a:xfrm>
-            <a:off x="0" y="5370539"/>
-            <a:ext cx="12191999" cy="1446550"/>
+            <a:off x="0" y="5370538"/>
+            <a:ext cx="12192000" cy="1446550"/>
           </a:xfrm>
           <a:prstGeom prst="rect">
             <a:avLst/>
@@ -4040,10 +4040,10 @@
       </p:sp>
       <p:sp>
         <p:nvSpPr>
-          <p:cNvPr id="5" name="TextBox 4">
-            <a:extLst>
-              <a:ext uri="{FF2B5EF4-FFF2-40B4-BE49-F238E27FC236}">
-                <a16:creationId xmlns:a16="http://schemas.microsoft.com/office/drawing/2014/main" id="{2B1B1083-638B-B6FC-054E-3701C62A3E62}"/>
+          <p:cNvPr id="3" name="TextBox 2">
+            <a:extLst>
+              <a:ext uri="{FF2B5EF4-FFF2-40B4-BE49-F238E27FC236}">
+                <a16:creationId xmlns:a16="http://schemas.microsoft.com/office/drawing/2014/main" id="{1090A8A0-091E-511C-C0D3-24178A47D68E}"/>
               </a:ext>
             </a:extLst>
           </p:cNvPr>
@@ -4052,7 +4052,7 @@
         </p:nvSpPr>
         <p:spPr>
           <a:xfrm>
-            <a:off x="0" y="5377728"/>
+            <a:off x="0" y="5377734"/>
             <a:ext cx="12192000" cy="1446550"/>
           </a:xfrm>
           <a:prstGeom prst="rect">
@@ -4160,7 +4160,7 @@
         <p:cNvPr id="1" name="">
           <a:extLst>
             <a:ext uri="{FF2B5EF4-FFF2-40B4-BE49-F238E27FC236}">
-              <a16:creationId xmlns:a16="http://schemas.microsoft.com/office/drawing/2014/main" id="{3D55D8B9-0C7C-1BC0-960C-C877373CA6F8}"/>
+              <a16:creationId xmlns:a16="http://schemas.microsoft.com/office/drawing/2014/main" id="{72DBA75A-FE2F-FB93-6CC3-01330D71CD0E}"/>
             </a:ext>
           </a:extLst>
         </p:cNvPr>
@@ -4180,7 +4180,7 @@
           <p:cNvPr id="6" name="Rectangle 5">
             <a:extLst>
               <a:ext uri="{FF2B5EF4-FFF2-40B4-BE49-F238E27FC236}">
-                <a16:creationId xmlns:a16="http://schemas.microsoft.com/office/drawing/2014/main" id="{8E88F326-90E7-13F4-ABEA-EE7BA8BB2142}"/>
+                <a16:creationId xmlns:a16="http://schemas.microsoft.com/office/drawing/2014/main" id="{02158552-C21E-0435-A76D-9CC2EA1C18FF}"/>
               </a:ext>
             </a:extLst>
           </p:cNvPr>
@@ -4233,7 +4233,7 @@
           <p:cNvPr id="3" name="TextBox 2">
             <a:extLst>
               <a:ext uri="{FF2B5EF4-FFF2-40B4-BE49-F238E27FC236}">
-                <a16:creationId xmlns:a16="http://schemas.microsoft.com/office/drawing/2014/main" id="{C9E04AF5-17FD-210A-B9DF-00A959474C14}"/>
+                <a16:creationId xmlns:a16="http://schemas.microsoft.com/office/drawing/2014/main" id="{FC7900C5-49EA-F9BF-BB1B-28A02C329AD8}"/>
               </a:ext>
             </a:extLst>
           </p:cNvPr>
@@ -4242,7 +4242,7 @@
         </p:nvSpPr>
         <p:spPr>
           <a:xfrm>
-            <a:off x="0" y="5373627"/>
+            <a:off x="0" y="5373630"/>
             <a:ext cx="12192000" cy="1446550"/>
           </a:xfrm>
           <a:prstGeom prst="rect">
@@ -4343,7 +4343,7 @@
     </p:spTree>
     <p:extLst>
       <p:ext uri="{BB962C8B-B14F-4D97-AF65-F5344CB8AC3E}">
-        <p14:creationId xmlns:p14="http://schemas.microsoft.com/office/powerpoint/2010/main" val="4035300340"/>
+        <p14:creationId xmlns:p14="http://schemas.microsoft.com/office/powerpoint/2010/main" val="4266738173"/>
       </p:ext>
     </p:extLst>
   </p:cSld>
@@ -4361,7 +4361,7 @@
         <p:cNvPr id="1" name="">
           <a:extLst>
             <a:ext uri="{FF2B5EF4-FFF2-40B4-BE49-F238E27FC236}">
-              <a16:creationId xmlns:a16="http://schemas.microsoft.com/office/drawing/2014/main" id="{9527F61E-2F1D-D435-0014-ADF3CECB2EEB}"/>
+              <a16:creationId xmlns:a16="http://schemas.microsoft.com/office/drawing/2014/main" id="{A7F90D6E-8CEE-860A-F133-6A48439A58AA}"/>
             </a:ext>
           </a:extLst>
         </p:cNvPr>
@@ -4381,7 +4381,7 @@
           <p:cNvPr id="6" name="Rectangle 5">
             <a:extLst>
               <a:ext uri="{FF2B5EF4-FFF2-40B4-BE49-F238E27FC236}">
-                <a16:creationId xmlns:a16="http://schemas.microsoft.com/office/drawing/2014/main" id="{07A85E76-3882-5A69-259D-C50A708F58BD}"/>
+                <a16:creationId xmlns:a16="http://schemas.microsoft.com/office/drawing/2014/main" id="{A00C1CEC-0938-8D5B-0DC8-C15685DB442A}"/>
               </a:ext>
             </a:extLst>
           </p:cNvPr>
@@ -4434,7 +4434,7 @@
           <p:cNvPr id="3" name="TextBox 2">
             <a:extLst>
               <a:ext uri="{FF2B5EF4-FFF2-40B4-BE49-F238E27FC236}">
-                <a16:creationId xmlns:a16="http://schemas.microsoft.com/office/drawing/2014/main" id="{6BEB65ED-3882-3FBC-E4DD-DD44419840AA}"/>
+                <a16:creationId xmlns:a16="http://schemas.microsoft.com/office/drawing/2014/main" id="{67D6AC60-BFBD-D7F5-5423-BE0F3814721B}"/>
               </a:ext>
             </a:extLst>
           </p:cNvPr>
@@ -4443,7 +4443,7 @@
         </p:nvSpPr>
         <p:spPr>
           <a:xfrm>
-            <a:off x="-1" y="5377728"/>
+            <a:off x="-1" y="5377724"/>
             <a:ext cx="12191999" cy="1446550"/>
           </a:xfrm>
           <a:prstGeom prst="rect">
@@ -4529,7 +4529,7 @@
     </p:spTree>
     <p:extLst>
       <p:ext uri="{BB962C8B-B14F-4D97-AF65-F5344CB8AC3E}">
-        <p14:creationId xmlns:p14="http://schemas.microsoft.com/office/powerpoint/2010/main" val="3457740603"/>
+        <p14:creationId xmlns:p14="http://schemas.microsoft.com/office/powerpoint/2010/main" val="3346981393"/>
       </p:ext>
     </p:extLst>
   </p:cSld>
@@ -4547,7 +4547,7 @@
         <p:cNvPr id="1" name="">
           <a:extLst>
             <a:ext uri="{FF2B5EF4-FFF2-40B4-BE49-F238E27FC236}">
-              <a16:creationId xmlns:a16="http://schemas.microsoft.com/office/drawing/2014/main" id="{55E72906-ABEF-D235-738A-7F8CB720DC3C}"/>
+              <a16:creationId xmlns:a16="http://schemas.microsoft.com/office/drawing/2014/main" id="{D1969919-85B2-701C-F85F-82CEC4E186CC}"/>
             </a:ext>
           </a:extLst>
         </p:cNvPr>
@@ -4567,7 +4567,7 @@
           <p:cNvPr id="6" name="Rectangle 5">
             <a:extLst>
               <a:ext uri="{FF2B5EF4-FFF2-40B4-BE49-F238E27FC236}">
-                <a16:creationId xmlns:a16="http://schemas.microsoft.com/office/drawing/2014/main" id="{A7E74BF9-A1A4-AAB3-5355-33B194D62A5C}"/>
+                <a16:creationId xmlns:a16="http://schemas.microsoft.com/office/drawing/2014/main" id="{42D6897A-F12C-86F7-589A-3E8A106D0687}"/>
               </a:ext>
             </a:extLst>
           </p:cNvPr>
@@ -4620,7 +4620,7 @@
           <p:cNvPr id="3" name="TextBox 2">
             <a:extLst>
               <a:ext uri="{FF2B5EF4-FFF2-40B4-BE49-F238E27FC236}">
-                <a16:creationId xmlns:a16="http://schemas.microsoft.com/office/drawing/2014/main" id="{1DA0CFFB-DD8D-2AC9-227A-55F5648ADF70}"/>
+                <a16:creationId xmlns:a16="http://schemas.microsoft.com/office/drawing/2014/main" id="{DB01064B-8502-BF7C-02B1-269D9544E085}"/>
               </a:ext>
             </a:extLst>
           </p:cNvPr>
@@ -4629,8 +4629,8 @@
         </p:nvSpPr>
         <p:spPr>
           <a:xfrm>
-            <a:off x="-1" y="5373623"/>
-            <a:ext cx="12191999" cy="1446550"/>
+            <a:off x="0" y="5373627"/>
+            <a:ext cx="12192000" cy="1446550"/>
           </a:xfrm>
           <a:prstGeom prst="rect">
             <a:avLst/>
@@ -4722,7 +4722,7 @@
     </p:spTree>
     <p:extLst>
       <p:ext uri="{BB962C8B-B14F-4D97-AF65-F5344CB8AC3E}">
-        <p14:creationId xmlns:p14="http://schemas.microsoft.com/office/powerpoint/2010/main" val="1646489719"/>
+        <p14:creationId xmlns:p14="http://schemas.microsoft.com/office/powerpoint/2010/main" val="3668407523"/>
       </p:ext>
     </p:extLst>
   </p:cSld>
@@ -4740,7 +4740,7 @@
         <p:cNvPr id="1" name="">
           <a:extLst>
             <a:ext uri="{FF2B5EF4-FFF2-40B4-BE49-F238E27FC236}">
-              <a16:creationId xmlns:a16="http://schemas.microsoft.com/office/drawing/2014/main" id="{55738D00-8BC1-9A5D-37F3-406B1DA4CCC5}"/>
+              <a16:creationId xmlns:a16="http://schemas.microsoft.com/office/drawing/2014/main" id="{73ADAF3B-63E4-6C2E-DAAC-97062617E82F}"/>
             </a:ext>
           </a:extLst>
         </p:cNvPr>
@@ -4760,7 +4760,7 @@
           <p:cNvPr id="6" name="Rectangle 5">
             <a:extLst>
               <a:ext uri="{FF2B5EF4-FFF2-40B4-BE49-F238E27FC236}">
-                <a16:creationId xmlns:a16="http://schemas.microsoft.com/office/drawing/2014/main" id="{D46CB769-B396-451E-B854-DDBB80FDB16F}"/>
+                <a16:creationId xmlns:a16="http://schemas.microsoft.com/office/drawing/2014/main" id="{2B61DE6E-2A12-4F09-583F-26B78CBA6023}"/>
               </a:ext>
             </a:extLst>
           </p:cNvPr>
@@ -4813,7 +4813,7 @@
           <p:cNvPr id="3" name="TextBox 2">
             <a:extLst>
               <a:ext uri="{FF2B5EF4-FFF2-40B4-BE49-F238E27FC236}">
-                <a16:creationId xmlns:a16="http://schemas.microsoft.com/office/drawing/2014/main" id="{2DA89E10-3C6B-EF2A-6E41-BBA73A6891B7}"/>
+                <a16:creationId xmlns:a16="http://schemas.microsoft.com/office/drawing/2014/main" id="{CD6A2871-0A60-88B2-77B1-D579591CFBA4}"/>
               </a:ext>
             </a:extLst>
           </p:cNvPr>
@@ -4822,8 +4822,8 @@
         </p:nvSpPr>
         <p:spPr>
           <a:xfrm>
-            <a:off x="0" y="5377726"/>
-            <a:ext cx="12192000" cy="1446550"/>
+            <a:off x="-1" y="5377733"/>
+            <a:ext cx="12192001" cy="1446550"/>
           </a:xfrm>
           <a:prstGeom prst="rect">
             <a:avLst/>
@@ -4919,7 +4919,7 @@
     </p:spTree>
     <p:extLst>
       <p:ext uri="{BB962C8B-B14F-4D97-AF65-F5344CB8AC3E}">
-        <p14:creationId xmlns:p14="http://schemas.microsoft.com/office/powerpoint/2010/main" val="2938313020"/>
+        <p14:creationId xmlns:p14="http://schemas.microsoft.com/office/powerpoint/2010/main" val="4161455082"/>
       </p:ext>
     </p:extLst>
   </p:cSld>
